--- a/builder/assets/reference-pages/route-tradeoff.pptx
+++ b/builder/assets/reference-pages/route-tradeoff.pptx
@@ -1211,7 +1211,7 @@
                   <a:srgbClr val="15375F"/>
                 </a:solidFill>
               </a:rPr>
-              <a:t>不做全面自建，先以外采平台＋内建数据资产的混合路线破局</a:t>
+              <a:t>Instead of building a comprehensive self-built platform, first source the platform from outside＋The hybrid route of built-in data assets breaks the news</a:t>
             </a:r>
           </a:p>
         </p:txBody>
@@ -1296,7 +1296,7 @@
                   <a:srgbClr val="697386"/>
                 </a:solidFill>
               </a:rPr>
-              <a:t>路线 A：自建 AI 中台</a:t>
+              <a:t>route A:Self-built AI Zhongtai</a:t>
             </a:r>
           </a:p>
         </p:txBody>
@@ -1346,7 +1346,7 @@
                   <a:srgbClr val="15375F"/>
                 </a:solidFill>
               </a:rPr>
-              <a:t>投入成本</a:t>
+              <a:t>input cost</a:t>
             </a:r>
           </a:p>
         </p:txBody>
@@ -1396,7 +1396,7 @@
                   <a:srgbClr val="172033"/>
                 </a:solidFill>
               </a:rPr>
-              <a:t>投入成本高</a:t>
+              <a:t>High investment cost</a:t>
             </a:r>
           </a:p>
           <a:p xmlns:a="http://schemas.openxmlformats.org/drawingml/2006/main">
@@ -1413,7 +1413,7 @@
                   <a:srgbClr val="172033"/>
                 </a:solidFill>
               </a:rPr>
-              <a:t>首年约 900 万</a:t>
+              <a:t>First year appointment 900 million</a:t>
             </a:r>
           </a:p>
         </p:txBody>
@@ -1544,7 +1544,7 @@
                   <a:srgbClr val="15375F"/>
                 </a:solidFill>
               </a:rPr>
-              <a:t>见效周期</a:t>
+              <a:t>Effective cycle</a:t>
             </a:r>
           </a:p>
         </p:txBody>
@@ -1594,7 +1594,7 @@
                   <a:srgbClr val="172033"/>
                 </a:solidFill>
               </a:rPr>
-              <a:t>见效周期长</a:t>
+              <a:t>Long effective period</a:t>
             </a:r>
           </a:p>
           <a:p xmlns:a="http://schemas.openxmlformats.org/drawingml/2006/main">
@@ -1611,7 +1611,7 @@
                   <a:srgbClr val="172033"/>
                 </a:solidFill>
               </a:rPr>
-              <a:t>约需 15 个月</a:t>
+              <a:t>Approximately required 15 months</a:t>
             </a:r>
           </a:p>
         </p:txBody>
@@ -1742,7 +1742,7 @@
                   <a:srgbClr val="15375F"/>
                 </a:solidFill>
               </a:rPr>
-              <a:t>能力沉淀</a:t>
+              <a:t>Ability accumulation</a:t>
             </a:r>
           </a:p>
         </p:txBody>
@@ -1792,7 +1792,7 @@
                   <a:srgbClr val="172033"/>
                 </a:solidFill>
               </a:rPr>
-              <a:t>能力沉淀强</a:t>
+              <a:t>Strong ability accumulation</a:t>
             </a:r>
           </a:p>
           <a:p xmlns:a="http://schemas.openxmlformats.org/drawingml/2006/main">
@@ -1809,7 +1809,7 @@
                   <a:srgbClr val="172033"/>
                 </a:solidFill>
               </a:rPr>
-              <a:t>核心资产留在内部</a:t>
+              <a:t>Core assets stay in-house</a:t>
             </a:r>
           </a:p>
         </p:txBody>
@@ -1909,7 +1909,7 @@
                   <a:srgbClr val="697386"/>
                 </a:solidFill>
               </a:rPr>
-              <a:t>总评分 5/9</a:t>
+              <a:t>Overall rating 5/9</a:t>
             </a:r>
           </a:p>
         </p:txBody>
@@ -1994,7 +1994,7 @@
                   <a:srgbClr val="15375F"/>
                 </a:solidFill>
               </a:rPr>
-              <a:t>路线 B：外采成熟平台</a:t>
+              <a:t>route B：Mature platform for outsourced procurement</a:t>
             </a:r>
           </a:p>
         </p:txBody>
@@ -2044,7 +2044,7 @@
                   <a:srgbClr val="15375F"/>
                 </a:solidFill>
               </a:rPr>
-              <a:t>投入成本</a:t>
+              <a:t>input cost</a:t>
             </a:r>
           </a:p>
         </p:txBody>
@@ -2094,7 +2094,7 @@
                   <a:srgbClr val="172033"/>
                 </a:solidFill>
               </a:rPr>
-              <a:t>投入成本低</a:t>
+              <a:t>Low investment cost</a:t>
             </a:r>
           </a:p>
           <a:p xmlns:a="http://schemas.openxmlformats.org/drawingml/2006/main">
@@ -2111,7 +2111,7 @@
                   <a:srgbClr val="172033"/>
                 </a:solidFill>
               </a:rPr>
-              <a:t>首年约 400 万</a:t>
+              <a:t>First year appointment 400 million</a:t>
             </a:r>
           </a:p>
         </p:txBody>
@@ -2242,7 +2242,7 @@
                   <a:srgbClr val="15375F"/>
                 </a:solidFill>
               </a:rPr>
-              <a:t>见效周期</a:t>
+              <a:t>Effective cycle</a:t>
             </a:r>
           </a:p>
         </p:txBody>
@@ -2292,7 +2292,7 @@
                   <a:srgbClr val="172033"/>
                 </a:solidFill>
               </a:rPr>
-              <a:t>见效周期短</a:t>
+              <a:t>Short effective period</a:t>
             </a:r>
           </a:p>
           <a:p xmlns:a="http://schemas.openxmlformats.org/drawingml/2006/main">
@@ -2309,7 +2309,7 @@
                   <a:srgbClr val="172033"/>
                 </a:solidFill>
               </a:rPr>
-              <a:t>约需 5 个月</a:t>
+              <a:t>Approximately required 5 months</a:t>
             </a:r>
           </a:p>
         </p:txBody>
@@ -2440,7 +2440,7 @@
                   <a:srgbClr val="15375F"/>
                 </a:solidFill>
               </a:rPr>
-              <a:t>能力沉淀</a:t>
+              <a:t>Ability accumulation</a:t>
             </a:r>
           </a:p>
         </p:txBody>
@@ -2490,7 +2490,7 @@
                   <a:srgbClr val="172033"/>
                 </a:solidFill>
               </a:rPr>
-              <a:t>能力沉淀弱</a:t>
+              <a:t>Weak ability accumulation</a:t>
             </a:r>
           </a:p>
           <a:p xmlns:a="http://schemas.openxmlformats.org/drawingml/2006/main">
@@ -2507,7 +2507,7 @@
                   <a:srgbClr val="172033"/>
                 </a:solidFill>
               </a:rPr>
-              <a:t>产品能力主要在外部</a:t>
+              <a:t>Product capabilities are mainly external</a:t>
             </a:r>
           </a:p>
         </p:txBody>
@@ -2607,7 +2607,7 @@
                   <a:srgbClr val="2F6FB2"/>
                 </a:solidFill>
               </a:rPr>
-              <a:t>总评分 7/9</a:t>
+              <a:t>Overall rating 7/9</a:t>
             </a:r>
           </a:p>
         </p:txBody>
@@ -2692,7 +2692,7 @@
                   <a:srgbClr val="E8872D"/>
                 </a:solidFill>
               </a:rPr>
-              <a:t>关键权衡</a:t>
+              <a:t>Key trade-offs</a:t>
             </a:r>
           </a:p>
         </p:txBody>
@@ -2746,7 +2746,7 @@
                   <a:srgbClr val="15375F"/>
                 </a:solidFill>
               </a:rPr>
-              <a:t>控制权 vs 速度</a:t>
+              <a:t>control vs speed</a:t>
             </a:r>
           </a:p>
         </p:txBody>
@@ -2800,7 +2800,7 @@
                   <a:srgbClr val="15375F"/>
                 </a:solidFill>
               </a:rPr>
-              <a:t>长期资产 vs 短期 ROI</a:t>
+              <a:t>long term assets vs short term ROI</a:t>
             </a:r>
           </a:p>
         </p:txBody>
@@ -2856,7 +2856,7 @@
                   <a:srgbClr val="15375F"/>
                 </a:solidFill>
               </a:rPr>
-              <a:t>推荐路线：外采平台承接通用能力，内部建设数据资产</a:t>
+              <a:t>Recommended route: External procurement platform undertakes general capabilities and builds data assets internally</a:t>
             </a:r>
           </a:p>
         </p:txBody>
